--- a/system-design-101/vi/lessons/sd-13-011/slides/sd-13-011.pptx
+++ b/system-design-101/vi/lessons/sd-13-011/slides/sd-13-011.pptx
@@ -1798,7 +1798,7 @@
         <p:spPr>
           <a:xfrm>
             <a:off x="914400" y="1333500"/>
-            <a:ext cx="15240000" cy="2857500"/>
+            <a:ext cx="16459200" cy="3429000"/>
           </a:xfrm>
           <a:prstGeom prst="rect">
             <a:avLst/>
@@ -1807,17 +1807,17 @@
           <a:ln/>
         </p:spPr>
         <p:txBody>
-          <a:bodyPr wrap="square" lIns="0" tIns="47535" rIns="0" bIns="-47535" rtlCol="0" anchor="t"/>
+          <a:bodyPr wrap="square" lIns="0" tIns="61722" rIns="0" bIns="-61722" rtlCol="0" anchor="t"/>
           <a:lstStyle/>
           <a:p>
             <a:pPr algn="l" indent="0" marL="0">
               <a:lnSpc>
-                <a:spcPts val="6737"/>
+                <a:spcPts val="8748"/>
               </a:lnSpc>
               <a:buNone/>
             </a:pPr>
             <a:r>
-              <a:rPr lang="en-US" sz="6238" dirty="0" spc="1" kern="0">
+              <a:rPr lang="en-US" sz="8100" dirty="0" spc="-1" kern="0">
                 <a:solidFill>
                   <a:srgbClr val="F3EEE3"/>
                 </a:solidFill>
@@ -1828,7 +1828,7 @@
               <a:t>Vì sao</a:t>
             </a:r>
             <a:r>
-              <a:rPr lang="en-US" sz="6238" dirty="0" spc="-19" kern="0">
+              <a:rPr lang="en-US" sz="8100" dirty="0" spc="-23" kern="0">
                 <a:solidFill>
                   <a:srgbClr val="F3EEE3"/>
                 </a:solidFill>
@@ -1839,7 +1839,7 @@
               <a:t> Docker</a:t>
             </a:r>
             <a:r>
-              <a:rPr lang="en-US" sz="6238" dirty="0" spc="6" kern="0">
+              <a:rPr lang="en-US" sz="8100" dirty="0" spc="5" kern="0">
                 <a:solidFill>
                   <a:srgbClr val="F3EEE3"/>
                 </a:solidFill>
@@ -1850,7 +1850,7 @@
               <a:t> build</a:t>
             </a:r>
             <a:r>
-              <a:rPr lang="en-US" sz="6238" dirty="0" spc="3" kern="0">
+              <a:rPr lang="en-US" sz="8100" dirty="0" spc="2" kern="0">
                 <a:solidFill>
                   <a:srgbClr val="F3EEE3"/>
                 </a:solidFill>
@@ -1861,7 +1861,7 @@
               <a:t> chạy</a:t>
             </a:r>
             <a:r>
-              <a:rPr lang="en-US" sz="6238" dirty="0" spc="0" kern="0">
+              <a:rPr lang="en-US" sz="8100" dirty="0" spc="-5" kern="0">
                 <a:solidFill>
                   <a:srgbClr val="F3EEE3"/>
                 </a:solidFill>
@@ -1872,7 +1872,7 @@
               <a:t> lại</a:t>
             </a:r>
             <a:r>
-              <a:rPr lang="en-US" sz="6238" dirty="0" spc="-80" kern="0">
+              <a:rPr lang="en-US" sz="8100" dirty="0" spc="-108" kern="0">
                 <a:solidFill>
                   <a:srgbClr val="F3EEE3"/>
                 </a:solidFill>
@@ -1883,7 +1883,7 @@
               <a:t> bước</a:t>
             </a:r>
             <a:r>
-              <a:rPr lang="en-US" sz="6238" dirty="0" spc="6" kern="0">
+              <a:rPr lang="en-US" sz="8100" dirty="0" spc="4" kern="0">
                 <a:solidFill>
                   <a:srgbClr val="F3EEE3"/>
                 </a:solidFill>
@@ -1894,7 +1894,7 @@
               <a:t> nặng:</a:t>
             </a:r>
             <a:r>
-              <a:rPr lang="en-US" sz="6238" dirty="0" spc="5" kern="0">
+              <a:rPr lang="en-US" sz="8100" dirty="0" spc="2" kern="0">
                 <a:solidFill>
                   <a:srgbClr val="F3EEE3"/>
                 </a:solidFill>
@@ -1902,10 +1902,10 @@
                 <a:ea typeface="Bricolage Grotesque ExtraBold" pitchFamily="34" charset="-122"/>
                 <a:cs typeface="Bricolage Grotesque ExtraBold" pitchFamily="34" charset="-120"/>
               </a:rPr>
-              <a:t> năm</a:t>
-            </a:r>
-            <a:r>
-              <a:rPr lang="en-US" sz="6238" dirty="0" spc="4" kern="0">
+              <a:t> năm nguyên</a:t>
+            </a:r>
+            <a:r>
+              <a:rPr lang="en-US" sz="8100" dirty="0" spc="0" kern="0">
                 <a:solidFill>
                   <a:srgbClr val="F3EEE3"/>
                 </a:solidFill>
@@ -1913,10 +1913,10 @@
                 <a:ea typeface="Bricolage Grotesque ExtraBold" pitchFamily="34" charset="-122"/>
                 <a:cs typeface="Bricolage Grotesque ExtraBold" pitchFamily="34" charset="-120"/>
               </a:rPr>
-              <a:t> nguyên nhân</a:t>
-            </a:r>
-            <a:r>
-              <a:rPr lang="en-US" sz="6238" dirty="0" spc="0" kern="0">
+              <a:t> nhân mất</a:t>
+            </a:r>
+            <a:r>
+              <a:rPr lang="en-US" sz="8100" dirty="0" spc="2" kern="0">
                 <a:solidFill>
                   <a:srgbClr val="F3EEE3"/>
                 </a:solidFill>
@@ -1924,20 +1924,9 @@
                 <a:ea typeface="Bricolage Grotesque ExtraBold" pitchFamily="34" charset="-122"/>
                 <a:cs typeface="Bricolage Grotesque ExtraBold" pitchFamily="34" charset="-120"/>
               </a:rPr>
-              <a:t> mất</a:t>
-            </a:r>
-            <a:r>
-              <a:rPr lang="en-US" sz="6238" dirty="0" spc="3" kern="0">
-                <a:solidFill>
-                  <a:srgbClr val="F3EEE3"/>
-                </a:solidFill>
-                <a:latin typeface="Bricolage Grotesque ExtraBold" pitchFamily="34" charset="0"/>
-                <a:ea typeface="Bricolage Grotesque ExtraBold" pitchFamily="34" charset="-122"/>
-                <a:cs typeface="Bricolage Grotesque ExtraBold" pitchFamily="34" charset="-120"/>
-              </a:rPr>
               <a:t> cache</a:t>
             </a:r>
-            <a:endParaRPr lang="en-US" sz="6238" dirty="0"/>
+            <a:endParaRPr lang="en-US" sz="8100" dirty="0"/>
           </a:p>
         </p:txBody>
       </p:sp>
@@ -1949,7 +1938,7 @@
         </p:nvSpPr>
         <p:spPr>
           <a:xfrm>
-            <a:off x="914400" y="4667250"/>
+            <a:off x="914400" y="4953000"/>
             <a:ext cx="16459200" cy="533400"/>
           </a:xfrm>
           <a:prstGeom prst="rect">
@@ -2804,101 +2793,7 @@
       </p:sp>
       <p:sp>
         <p:nvSpPr>
-          <p:cNvPr id="20" name="Text 18"/>
-          <p:cNvSpPr/>
-          <p:nvPr/>
-        </p:nvSpPr>
-        <p:spPr>
-          <a:xfrm>
-            <a:off x="914400" y="9525000"/>
-            <a:ext cx="8572500" cy="342900"/>
-          </a:xfrm>
-          <a:prstGeom prst="rect">
-            <a:avLst/>
-          </a:prstGeom>
-          <a:noFill/>
-          <a:ln/>
-        </p:spPr>
-        <p:txBody>
-          <a:bodyPr wrap="square" lIns="0" tIns="0" rIns="0" bIns="0" rtlCol="0" anchor="t"/>
-          <a:lstStyle/>
-          <a:p>
-            <a:pPr algn="l" indent="0" marL="0">
-              <a:buNone/>
-            </a:pPr>
-            <a:r>
-              <a:rPr lang="en-US" sz="1800" dirty="0" spc="-13" kern="0">
-                <a:solidFill>
-                  <a:srgbClr val="9AA0B5"/>
-                </a:solidFill>
-                <a:latin typeface="Be Vietnam Pro" pitchFamily="34" charset="0"/>
-                <a:ea typeface="Be Vietnam Pro" pitchFamily="34" charset="-122"/>
-                <a:cs typeface="Be Vietnam Pro" pitchFamily="34" charset="-120"/>
-              </a:rPr>
-              <a:t>System</a:t>
-            </a:r>
-            <a:r>
-              <a:rPr lang="en-US" sz="1800" dirty="0" spc="-1" kern="0">
-                <a:solidFill>
-                  <a:srgbClr val="9AA0B5"/>
-                </a:solidFill>
-                <a:latin typeface="Be Vietnam Pro" pitchFamily="34" charset="0"/>
-                <a:ea typeface="Be Vietnam Pro" pitchFamily="34" charset="-122"/>
-                <a:cs typeface="Be Vietnam Pro" pitchFamily="34" charset="-120"/>
-              </a:rPr>
-              <a:t> Design</a:t>
-            </a:r>
-            <a:r>
-              <a:rPr lang="en-US" sz="1800" dirty="0" spc="4" kern="0">
-                <a:solidFill>
-                  <a:srgbClr val="9AA0B5"/>
-                </a:solidFill>
-                <a:latin typeface="Be Vietnam Pro" pitchFamily="34" charset="0"/>
-                <a:ea typeface="Be Vietnam Pro" pitchFamily="34" charset="-122"/>
-                <a:cs typeface="Be Vietnam Pro" pitchFamily="34" charset="-120"/>
-              </a:rPr>
-              <a:t> 101</a:t>
-            </a:r>
-            <a:r>
-              <a:rPr lang="en-US" sz="1800" dirty="0" spc="-2" kern="0">
-                <a:solidFill>
-                  <a:srgbClr val="9AA0B5"/>
-                </a:solidFill>
-                <a:latin typeface="Be Vietnam Pro" pitchFamily="34" charset="0"/>
-                <a:ea typeface="Be Vietnam Pro" pitchFamily="34" charset="-122"/>
-                <a:cs typeface="Be Vietnam Pro" pitchFamily="34" charset="-120"/>
-              </a:rPr>
-              <a:t> ·</a:t>
-            </a:r>
-            <a:r>
-              <a:rPr lang="en-US" sz="1800" dirty="0" spc="1" kern="0">
-                <a:solidFill>
-                  <a:srgbClr val="9AA0B5"/>
-                </a:solidFill>
-                <a:latin typeface="Be Vietnam Pro" pitchFamily="34" charset="0"/>
-                <a:ea typeface="Be Vietnam Pro" pitchFamily="34" charset="-122"/>
-                <a:cs typeface="Be Vietnam Pro" pitchFamily="34" charset="-120"/>
-              </a:rPr>
-              <a:t> Bài</a:t>
-            </a:r>
-            <a:r>
-              <a:rPr lang="en-US" sz="1800" dirty="0" spc="4" kern="0">
-                <a:solidFill>
-                  <a:srgbClr val="9AA0B5"/>
-                </a:solidFill>
-                <a:latin typeface="Be Vietnam Pro" pitchFamily="34" charset="0"/>
-                <a:ea typeface="Be Vietnam Pro" pitchFamily="34" charset="-122"/>
-                <a:cs typeface="Be Vietnam Pro" pitchFamily="34" charset="-120"/>
-              </a:rPr>
-              <a:t> 11</a:t>
-            </a:r>
-            <a:endParaRPr lang="en-US" sz="1800" dirty="0"/>
-          </a:p>
-        </p:txBody>
-      </p:sp>
-      <p:sp>
-        <p:nvSpPr>
-          <p:cNvPr id="21" name="Shape 19"/>
+          <p:cNvPr id="20" name="Shape 18"/>
           <p:cNvSpPr/>
           <p:nvPr/>
         </p:nvSpPr>
@@ -2922,7 +2817,7 @@
       </p:sp>
       <p:pic>
         <p:nvPicPr>
-          <p:cNvPr id="22" name="Moda image moda-export-watermark-c86f0bb7-907c-458d-bc6a-df94552b32c6" descr="">    </p:cNvPr>
+          <p:cNvPr id="21" name="Moda image moda-export-watermark-c86f0bb7-907c-458d-bc6a-df94552b32c6" descr="">    </p:cNvPr>
           <p:cNvPicPr>
             <a:picLocks noChangeAspect="1"/>
           </p:cNvPicPr>

--- a/system-design-101/vi/lessons/sd-13-011/slides/sd-13-011.pptx
+++ b/system-design-101/vi/lessons/sd-13-011/slides/sd-13-011.pptx
@@ -5550,7 +5550,7 @@
               <a:t> đưa</a:t>
             </a:r>
             <a:r>
-              <a:rPr lang="en-US" sz="2270" dirty="0" spc="-3" kern="0">
+              <a:rPr lang="en-US" sz="2270" dirty="0" spc="-7" kern="0">
                 <a:solidFill>
                   <a:srgbClr val="F3EEE3"/>
                 </a:solidFill>
@@ -5558,10 +5558,10 @@
                 <a:ea typeface="Be Vietnam Pro SemiBold" pitchFamily="34" charset="-122"/>
                 <a:cs typeface="Be Vietnam Pro SemiBold" pitchFamily="34" charset="-120"/>
               </a:rPr>
-              <a:t> cả</a:t>
-            </a:r>
-            <a:r>
-              <a:rPr lang="en-US" sz="2270" dirty="0" spc="-7" kern="0">
+              <a:t> mã</a:t>
+            </a:r>
+            <a:r>
+              <a:rPr lang="en-US" sz="2270" dirty="0" spc="-12" kern="0">
                 <a:solidFill>
                   <a:srgbClr val="F3EEE3"/>
                 </a:solidFill>
@@ -5569,10 +5569,10 @@
                 <a:ea typeface="Be Vietnam Pro SemiBold" pitchFamily="34" charset="-122"/>
                 <a:cs typeface="Be Vietnam Pro SemiBold" pitchFamily="34" charset="-120"/>
               </a:rPr>
-              <a:t> mã</a:t>
-            </a:r>
-            <a:r>
-              <a:rPr lang="en-US" sz="2270" dirty="0" spc="-12" kern="0">
+              <a:t> vào</a:t>
+            </a:r>
+            <a:r>
+              <a:rPr lang="en-US" sz="2270" dirty="0" spc="6" kern="0">
                 <a:solidFill>
                   <a:srgbClr val="F3EEE3"/>
                 </a:solidFill>
@@ -5580,10 +5580,10 @@
                 <a:ea typeface="Be Vietnam Pro SemiBold" pitchFamily="34" charset="-122"/>
                 <a:cs typeface="Be Vietnam Pro SemiBold" pitchFamily="34" charset="-120"/>
               </a:rPr>
-              <a:t> vào</a:t>
-            </a:r>
-            <a:r>
-              <a:rPr lang="en-US" sz="2270" dirty="0" spc="6" kern="0">
+              <a:t> trước</a:t>
+            </a:r>
+            <a:r>
+              <a:rPr lang="en-US" sz="2270" dirty="0" spc="-2" kern="0">
                 <a:solidFill>
                   <a:srgbClr val="F3EEE3"/>
                 </a:solidFill>
@@ -5591,40 +5591,7 @@
                 <a:ea typeface="Be Vietnam Pro SemiBold" pitchFamily="34" charset="-122"/>
                 <a:cs typeface="Be Vietnam Pro SemiBold" pitchFamily="34" charset="-120"/>
               </a:rPr>
-              <a:t> trước</a:t>
-            </a:r>
-            <a:r>
-              <a:rPr lang="en-US" sz="2270" dirty="0" spc="-2" kern="0">
-                <a:solidFill>
-                  <a:srgbClr val="F3EEE3"/>
-                </a:solidFill>
-                <a:latin typeface="Be Vietnam Pro SemiBold" pitchFamily="34" charset="0"/>
-                <a:ea typeface="Be Vietnam Pro SemiBold" pitchFamily="34" charset="-122"/>
-                <a:cs typeface="Be Vietnam Pro SemiBold" pitchFamily="34" charset="-120"/>
-              </a:rPr>
               <a:t> khi cài</a:t>
-            </a:r>
-            <a:r>
-              <a:rPr lang="en-US" sz="2270" dirty="0" spc="-4" kern="0">
-                <a:solidFill>
-                  <a:srgbClr val="F3EEE3"/>
-                </a:solidFill>
-                <a:latin typeface="Be Vietnam Pro SemiBold" pitchFamily="34" charset="0"/>
-                <a:ea typeface="Be Vietnam Pro SemiBold" pitchFamily="34" charset="-122"/>
-                <a:cs typeface="Be Vietnam Pro SemiBold" pitchFamily="34" charset="-120"/>
-              </a:rPr>
-              <a:t> phụ</a:t>
-            </a:r>
-            <a:r>
-              <a:rPr lang="en-US" sz="2270" dirty="0" spc="-3" kern="0">
-                <a:solidFill>
-                  <a:srgbClr val="F3EEE3"/>
-                </a:solidFill>
-                <a:latin typeface="Be Vietnam Pro SemiBold" pitchFamily="34" charset="0"/>
-                <a:ea typeface="Be Vietnam Pro SemiBold" pitchFamily="34" charset="-122"/>
-                <a:cs typeface="Be Vietnam Pro SemiBold" pitchFamily="34" charset="-120"/>
-              </a:rPr>
-              <a:t> thuộc</a:t>
             </a:r>
             <a:endParaRPr lang="en-US" sz="2270" dirty="0"/>
           </a:p>
@@ -5668,7 +5635,7 @@
               <a:t> khai</a:t>
             </a:r>
             <a:r>
-              <a:rPr lang="en-US" sz="2270" dirty="0" spc="0" kern="0">
+              <a:rPr lang="en-US" sz="2270" dirty="0" spc="1" kern="0">
                 <a:solidFill>
                   <a:srgbClr val="F3EEE3"/>
                 </a:solidFill>
@@ -5676,10 +5643,10 @@
                 <a:ea typeface="Be Vietnam Pro SemiBold" pitchFamily="34" charset="-122"/>
                 <a:cs typeface="Be Vietnam Pro SemiBold" pitchFamily="34" charset="-120"/>
               </a:rPr>
-              <a:t> báo</a:t>
-            </a:r>
-            <a:r>
-              <a:rPr lang="en-US" sz="2270" dirty="0" spc="-4" kern="0">
+              <a:t> báo,</a:t>
+            </a:r>
+            <a:r>
+              <a:rPr lang="en-US" sz="2270" dirty="0" spc="-1" kern="0">
                 <a:solidFill>
                   <a:srgbClr val="F3EEE3"/>
                 </a:solidFill>
@@ -5687,10 +5654,10 @@
                 <a:ea typeface="Be Vietnam Pro SemiBold" pitchFamily="34" charset="-122"/>
                 <a:cs typeface="Be Vietnam Pro SemiBold" pitchFamily="34" charset="-120"/>
               </a:rPr>
-              <a:t> phụ</a:t>
-            </a:r>
-            <a:r>
-              <a:rPr lang="en-US" sz="2270" dirty="0" spc="-2" kern="0">
+              <a:t> cài,</a:t>
+            </a:r>
+            <a:r>
+              <a:rPr lang="en-US" sz="2270" dirty="0" spc="-19" kern="0">
                 <a:solidFill>
                   <a:srgbClr val="F3EEE3"/>
                 </a:solidFill>
@@ -5698,10 +5665,10 @@
                 <a:ea typeface="Be Vietnam Pro SemiBold" pitchFamily="34" charset="-122"/>
                 <a:cs typeface="Be Vietnam Pro SemiBold" pitchFamily="34" charset="-120"/>
               </a:rPr>
-              <a:t> thuộc,</a:t>
-            </a:r>
-            <a:r>
-              <a:rPr lang="en-US" sz="2270" dirty="0" spc="-1" kern="0">
+              <a:t> rồi</a:t>
+            </a:r>
+            <a:r>
+              <a:rPr lang="en-US" sz="2270" dirty="0" spc="-17" kern="0">
                 <a:solidFill>
                   <a:srgbClr val="F3EEE3"/>
                 </a:solidFill>
@@ -5709,43 +5676,10 @@
                 <a:ea typeface="Be Vietnam Pro SemiBold" pitchFamily="34" charset="-122"/>
                 <a:cs typeface="Be Vietnam Pro SemiBold" pitchFamily="34" charset="-120"/>
               </a:rPr>
-              <a:t> cài,</a:t>
-            </a:r>
-            <a:r>
-              <a:rPr lang="en-US" sz="2270" dirty="0" spc="-18" kern="0">
-                <a:solidFill>
-                  <a:srgbClr val="F3EEE3"/>
-                </a:solidFill>
-                <a:latin typeface="Be Vietnam Pro SemiBold" pitchFamily="34" charset="0"/>
-                <a:ea typeface="Be Vietnam Pro SemiBold" pitchFamily="34" charset="-122"/>
-                <a:cs typeface="Be Vietnam Pro SemiBold" pitchFamily="34" charset="-120"/>
-              </a:rPr>
-              <a:t> rồi</a:t>
-            </a:r>
-            <a:r>
-              <a:rPr lang="en-US" sz="2270" dirty="0" spc="-2" kern="0">
-                <a:solidFill>
-                  <a:srgbClr val="F3EEE3"/>
-                </a:solidFill>
-                <a:latin typeface="Be Vietnam Pro SemiBold" pitchFamily="34" charset="0"/>
-                <a:ea typeface="Be Vietnam Pro SemiBold" pitchFamily="34" charset="-122"/>
-                <a:cs typeface="Be Vietnam Pro SemiBold" pitchFamily="34" charset="-120"/>
-              </a:rPr>
-              <a:t> mới</a:t>
-            </a:r>
-            <a:r>
-              <a:rPr lang="en-US" sz="2270" dirty="0" spc="-17" kern="0">
-                <a:solidFill>
-                  <a:srgbClr val="F3EEE3"/>
-                </a:solidFill>
-                <a:latin typeface="Be Vietnam Pro SemiBold" pitchFamily="34" charset="0"/>
-                <a:ea typeface="Be Vietnam Pro SemiBold" pitchFamily="34" charset="-122"/>
-                <a:cs typeface="Be Vietnam Pro SemiBold" pitchFamily="34" charset="-120"/>
-              </a:rPr>
               <a:t> copy</a:t>
             </a:r>
             <a:r>
-              <a:rPr lang="en-US" sz="2270" dirty="0" spc="-6" kern="0">
+              <a:rPr lang="en-US" sz="2270" dirty="0" spc="-7" kern="0">
                 <a:solidFill>
                   <a:srgbClr val="F3EEE3"/>
                 </a:solidFill>

--- a/system-design-101/vi/lessons/sd-13-011/slides/sd-13-011.pptx
+++ b/system-design-101/vi/lessons/sd-13-011/slides/sd-13-011.pptx
@@ -3996,7 +3996,7 @@
               <a:buNone/>
             </a:pPr>
             <a:r>
-              <a:rPr lang="en-US" sz="6300" dirty="0" spc="2" kern="0">
+              <a:rPr lang="en-US" sz="6900" dirty="0" spc="-2" kern="0">
                 <a:solidFill>
                   <a:srgbClr val="14161C"/>
                 </a:solidFill>
@@ -4007,7 +4007,7 @@
               <a:t>Mất</a:t>
             </a:r>
             <a:r>
-              <a:rPr lang="en-US" sz="6300" dirty="0" spc="-1" kern="0">
+              <a:rPr lang="en-US" sz="6900" dirty="0" spc="0" kern="0">
                 <a:solidFill>
                   <a:srgbClr val="14161C"/>
                 </a:solidFill>
@@ -4018,7 +4018,7 @@
               <a:t> cache</a:t>
             </a:r>
             <a:r>
-              <a:rPr lang="en-US" sz="6300" dirty="0" spc="2" kern="0">
+              <a:rPr lang="en-US" sz="6900" dirty="0" spc="21" kern="0">
                 <a:solidFill>
                   <a:srgbClr val="14161C"/>
                 </a:solidFill>
@@ -4026,10 +4026,10 @@
                 <a:ea typeface="Bricolage Grotesque ExtraBold" pitchFamily="34" charset="-122"/>
                 <a:cs typeface="Bricolage Grotesque ExtraBold" pitchFamily="34" charset="-120"/>
               </a:rPr>
-              <a:t> nào</a:t>
-            </a:r>
-            <a:r>
-              <a:rPr lang="en-US" sz="6300" dirty="0" spc="-1" kern="0">
+              <a:t> đều</a:t>
+            </a:r>
+            <a:r>
+              <a:rPr lang="en-US" sz="6900" dirty="0" spc="7" kern="0">
                 <a:solidFill>
                   <a:srgbClr val="14161C"/>
                 </a:solidFill>
@@ -4037,10 +4037,10 @@
                 <a:ea typeface="Bricolage Grotesque ExtraBold" pitchFamily="34" charset="-122"/>
                 <a:cs typeface="Bricolage Grotesque ExtraBold" pitchFamily="34" charset="-120"/>
               </a:rPr>
-              <a:t> cũng</a:t>
-            </a:r>
-            <a:r>
-              <a:rPr lang="en-US" sz="6300" dirty="0" spc="6" kern="0">
+              <a:t> truy</a:t>
+            </a:r>
+            <a:r>
+              <a:rPr lang="en-US" sz="6900" dirty="0" spc="-41" kern="0">
                 <a:solidFill>
                   <a:srgbClr val="14161C"/>
                 </a:solidFill>
@@ -4048,10 +4048,10 @@
                 <a:ea typeface="Bricolage Grotesque ExtraBold" pitchFamily="34" charset="-122"/>
                 <a:cs typeface="Bricolage Grotesque ExtraBold" pitchFamily="34" charset="-120"/>
               </a:rPr>
-              <a:t> truy</a:t>
-            </a:r>
-            <a:r>
-              <a:rPr lang="en-US" sz="6300" dirty="0" spc="-38" kern="0">
+              <a:t> ra</a:t>
+            </a:r>
+            <a:r>
+              <a:rPr lang="en-US" sz="6900" dirty="0" spc="4" kern="0">
                 <a:solidFill>
                   <a:srgbClr val="14161C"/>
                 </a:solidFill>
@@ -4059,10 +4059,10 @@
                 <a:ea typeface="Bricolage Grotesque ExtraBold" pitchFamily="34" charset="-122"/>
                 <a:cs typeface="Bricolage Grotesque ExtraBold" pitchFamily="34" charset="-120"/>
               </a:rPr>
-              <a:t> ra</a:t>
-            </a:r>
-            <a:r>
-              <a:rPr lang="en-US" sz="6300" dirty="0" spc="1" kern="0">
+              <a:t> nguyên</a:t>
+            </a:r>
+            <a:r>
+              <a:rPr lang="en-US" sz="6900" dirty="0" spc="1" kern="0">
                 <a:solidFill>
                   <a:srgbClr val="14161C"/>
                 </a:solidFill>
@@ -4070,20 +4070,9 @@
                 <a:ea typeface="Bricolage Grotesque ExtraBold" pitchFamily="34" charset="-122"/>
                 <a:cs typeface="Bricolage Grotesque ExtraBold" pitchFamily="34" charset="-120"/>
               </a:rPr>
-              <a:t> nguyên</a:t>
-            </a:r>
-            <a:r>
-              <a:rPr lang="en-US" sz="6300" dirty="0" spc="2" kern="0">
-                <a:solidFill>
-                  <a:srgbClr val="14161C"/>
-                </a:solidFill>
-                <a:latin typeface="Bricolage Grotesque ExtraBold" pitchFamily="34" charset="0"/>
-                <a:ea typeface="Bricolage Grotesque ExtraBold" pitchFamily="34" charset="-122"/>
-                <a:cs typeface="Bricolage Grotesque ExtraBold" pitchFamily="34" charset="-120"/>
-              </a:rPr>
               <a:t> nhân</a:t>
             </a:r>
-            <a:endParaRPr lang="en-US" sz="6300" dirty="0"/>
+            <a:endParaRPr lang="en-US" sz="6900" dirty="0"/>
           </a:p>
         </p:txBody>
       </p:sp>
@@ -10824,7 +10813,7 @@
         <p:spPr>
           <a:xfrm>
             <a:off x="914400" y="1238250"/>
-            <a:ext cx="16459200" cy="1238250"/>
+            <a:ext cx="16459200" cy="1143000"/>
           </a:xfrm>
           <a:prstGeom prst="rect">
             <a:avLst/>
@@ -10840,7 +10829,7 @@
               <a:buNone/>
             </a:pPr>
             <a:r>
-              <a:rPr lang="en-US" sz="5100" dirty="0" spc="-59" kern="0">
+              <a:rPr lang="en-US" sz="6900" dirty="0" spc="-79" kern="0">
                 <a:solidFill>
                   <a:srgbClr val="F3EEE3"/>
                 </a:solidFill>
@@ -10851,7 +10840,7 @@
               <a:t>Sửa</a:t>
             </a:r>
             <a:r>
-              <a:rPr lang="en-US" sz="5100" dirty="0" spc="0" kern="0">
+              <a:rPr lang="en-US" sz="6900" dirty="0" spc="0" kern="0">
                 <a:solidFill>
                   <a:srgbClr val="F3EEE3"/>
                 </a:solidFill>
@@ -10859,10 +10848,10 @@
                 <a:ea typeface="Bricolage Grotesque ExtraBold" pitchFamily="34" charset="-122"/>
                 <a:cs typeface="Bricolage Grotesque ExtraBold" pitchFamily="34" charset="-120"/>
               </a:rPr>
-              <a:t> README:</a:t>
-            </a:r>
-            <a:r>
-              <a:rPr lang="en-US" sz="5100" dirty="0" spc="1" kern="0">
+              <a:t> README</a:t>
+            </a:r>
+            <a:r>
+              <a:rPr lang="en-US" sz="6900" dirty="0" spc="-2" kern="0">
                 <a:solidFill>
                   <a:srgbClr val="F3EEE3"/>
                 </a:solidFill>
@@ -10873,7 +10862,7 @@
               <a:t> có</a:t>
             </a:r>
             <a:r>
-              <a:rPr lang="en-US" sz="5100" dirty="0" spc="4" kern="0">
+              <a:rPr lang="en-US" sz="6900" dirty="0" spc="0" kern="0">
                 <a:solidFill>
                   <a:srgbClr val="F3EEE3"/>
                 </a:solidFill>
@@ -10881,10 +10870,10 @@
                 <a:ea typeface="Bricolage Grotesque ExtraBold" pitchFamily="34" charset="-122"/>
                 <a:cs typeface="Bricolage Grotesque ExtraBold" pitchFamily="34" charset="-120"/>
               </a:rPr>
-              <a:t> phải</a:t>
-            </a:r>
-            <a:r>
-              <a:rPr lang="en-US" sz="5100" dirty="0" spc="0" kern="0">
+              <a:t> cài</a:t>
+            </a:r>
+            <a:r>
+              <a:rPr lang="en-US" sz="6900" dirty="0" spc="1" kern="0">
                 <a:solidFill>
                   <a:srgbClr val="F3EEE3"/>
                 </a:solidFill>
@@ -10892,10 +10881,10 @@
                 <a:ea typeface="Bricolage Grotesque ExtraBold" pitchFamily="34" charset="-122"/>
                 <a:cs typeface="Bricolage Grotesque ExtraBold" pitchFamily="34" charset="-120"/>
               </a:rPr>
-              <a:t> cài</a:t>
-            </a:r>
-            <a:r>
-              <a:rPr lang="en-US" sz="5100" dirty="0" spc="1" kern="0">
+              <a:t> lại</a:t>
+            </a:r>
+            <a:r>
+              <a:rPr lang="en-US" sz="6900" dirty="0" spc="5" kern="0">
                 <a:solidFill>
                   <a:srgbClr val="F3EEE3"/>
                 </a:solidFill>
@@ -10903,10 +10892,10 @@
                 <a:ea typeface="Bricolage Grotesque ExtraBold" pitchFamily="34" charset="-122"/>
                 <a:cs typeface="Bricolage Grotesque ExtraBold" pitchFamily="34" charset="-120"/>
               </a:rPr>
-              <a:t> lại</a:t>
-            </a:r>
-            <a:r>
-              <a:rPr lang="en-US" sz="5100" dirty="0" spc="5" kern="0">
+              <a:t> phụ</a:t>
+            </a:r>
+            <a:r>
+              <a:rPr lang="en-US" sz="6900" dirty="0" spc="-20" kern="0">
                 <a:solidFill>
                   <a:srgbClr val="F3EEE3"/>
                 </a:solidFill>
@@ -10914,31 +10903,9 @@
                 <a:ea typeface="Bricolage Grotesque ExtraBold" pitchFamily="34" charset="-122"/>
                 <a:cs typeface="Bricolage Grotesque ExtraBold" pitchFamily="34" charset="-120"/>
               </a:rPr>
-              <a:t> phụ</a:t>
-            </a:r>
-            <a:r>
-              <a:rPr lang="en-US" sz="5100" dirty="0" spc="1" kern="0">
-                <a:solidFill>
-                  <a:srgbClr val="F3EEE3"/>
-                </a:solidFill>
-                <a:latin typeface="Bricolage Grotesque ExtraBold" pitchFamily="34" charset="0"/>
-                <a:ea typeface="Bricolage Grotesque ExtraBold" pitchFamily="34" charset="-122"/>
-                <a:cs typeface="Bricolage Grotesque ExtraBold" pitchFamily="34" charset="-120"/>
-              </a:rPr>
-              <a:t> thuộc</a:t>
-            </a:r>
-            <a:r>
-              <a:rPr lang="en-US" sz="5100" dirty="0" spc="0" kern="0">
-                <a:solidFill>
-                  <a:srgbClr val="F3EEE3"/>
-                </a:solidFill>
-                <a:latin typeface="Bricolage Grotesque ExtraBold" pitchFamily="34" charset="0"/>
-                <a:ea typeface="Bricolage Grotesque ExtraBold" pitchFamily="34" charset="-122"/>
-                <a:cs typeface="Bricolage Grotesque ExtraBold" pitchFamily="34" charset="-120"/>
-              </a:rPr>
-              <a:t> không?</a:t>
-            </a:r>
-            <a:endParaRPr lang="en-US" sz="5100" dirty="0"/>
+              <a:t> thuộc?</a:t>
+            </a:r>
+            <a:endParaRPr lang="en-US" sz="6900" dirty="0"/>
           </a:p>
         </p:txBody>
       </p:sp>

--- a/system-design-101/vi/lessons/sd-13-011/slides/sd-13-011.pptx
+++ b/system-design-101/vi/lessons/sd-13-011/slides/sd-13-011.pptx
@@ -6705,18 +6705,7 @@
               <a:t> thì không</a:t>
             </a:r>
             <a:r>
-              <a:rPr lang="en-US" sz="2550" dirty="0" spc="0" kern="0">
-                <a:solidFill>
-                  <a:srgbClr val="14161C"/>
-                </a:solidFill>
-                <a:latin typeface="Be Vietnam Pro" pitchFamily="34" charset="0"/>
-                <a:ea typeface="Be Vietnam Pro" pitchFamily="34" charset="-122"/>
-                <a:cs typeface="Be Vietnam Pro" pitchFamily="34" charset="-120"/>
-              </a:rPr>
-              <a:t> làm</a:t>
-            </a:r>
-            <a:r>
-              <a:rPr lang="en-US" sz="2550" dirty="0" spc="-10" kern="0">
+              <a:rPr lang="en-US" sz="2550" dirty="0" spc="-11" kern="0">
                 <a:solidFill>
                   <a:srgbClr val="14161C"/>
                 </a:solidFill>
@@ -7327,6 +7316,17 @@
               <a:t> thường</a:t>
             </a:r>
             <a:r>
+              <a:rPr lang="en-US" sz="3000" dirty="0" spc="-9" kern="0">
+                <a:solidFill>
+                  <a:srgbClr val="14161C"/>
+                </a:solidFill>
+                <a:latin typeface="Be Vietnam Pro" pitchFamily="34" charset="0"/>
+                <a:ea typeface="Be Vietnam Pro" pitchFamily="34" charset="-122"/>
+                <a:cs typeface="Be Vietnam Pro" pitchFamily="34" charset="-120"/>
+              </a:rPr>
+              <a:t> so</a:t>
+            </a:r>
+            <a:r>
               <a:rPr lang="en-US" sz="3000" dirty="0" spc="2" kern="0">
                 <a:solidFill>
                   <a:srgbClr val="14161C"/>
@@ -7335,18 +7335,18 @@
                 <a:ea typeface="Be Vietnam Pro" pitchFamily="34" charset="-122"/>
                 <a:cs typeface="Be Vietnam Pro" pitchFamily="34" charset="-120"/>
               </a:rPr>
-              <a:t> chỉ</a:t>
-            </a:r>
-            <a:r>
-              <a:rPr lang="en-US" sz="3000" dirty="0" spc="-10" kern="0">
-                <a:solidFill>
-                  <a:srgbClr val="14161C"/>
-                </a:solidFill>
-                <a:latin typeface="Be Vietnam Pro" pitchFamily="34" charset="0"/>
-                <a:ea typeface="Be Vietnam Pro" pitchFamily="34" charset="-122"/>
-                <a:cs typeface="Be Vietnam Pro" pitchFamily="34" charset="-120"/>
-              </a:rPr>
-              <a:t> so</a:t>
+              <a:t> chuỗi</a:t>
+            </a:r>
+            <a:r>
+              <a:rPr lang="en-US" sz="3000" dirty="0" spc="-1" kern="0">
+                <a:solidFill>
+                  <a:srgbClr val="14161C"/>
+                </a:solidFill>
+                <a:latin typeface="Be Vietnam Pro" pitchFamily="34" charset="0"/>
+                <a:ea typeface="Be Vietnam Pro" pitchFamily="34" charset="-122"/>
+                <a:cs typeface="Be Vietnam Pro" pitchFamily="34" charset="-120"/>
+              </a:rPr>
+              <a:t> lệnh,</a:t>
             </a:r>
             <a:r>
               <a:rPr lang="en-US" sz="3000" dirty="0" spc="2" kern="0">
@@ -7357,7 +7357,29 @@
                 <a:ea typeface="Be Vietnam Pro" pitchFamily="34" charset="-122"/>
                 <a:cs typeface="Be Vietnam Pro" pitchFamily="34" charset="-120"/>
               </a:rPr>
-              <a:t> chuỗi</a:t>
+              <a:t> không</a:t>
+            </a:r>
+            <a:r>
+              <a:rPr lang="en-US" sz="3000" dirty="0" spc="-30" kern="0">
+                <a:solidFill>
+                  <a:srgbClr val="14161C"/>
+                </a:solidFill>
+                <a:latin typeface="Be Vietnam Pro" pitchFamily="34" charset="0"/>
+                <a:ea typeface="Be Vietnam Pro" pitchFamily="34" charset="-122"/>
+                <a:cs typeface="Be Vietnam Pro" pitchFamily="34" charset="-120"/>
+              </a:rPr>
+              <a:t> xét</a:t>
+            </a:r>
+            <a:r>
+              <a:rPr lang="en-US" sz="3000" dirty="0" spc="-21" kern="0">
+                <a:solidFill>
+                  <a:srgbClr val="14161C"/>
+                </a:solidFill>
+                <a:latin typeface="Be Vietnam Pro" pitchFamily="34" charset="0"/>
+                <a:ea typeface="Be Vietnam Pro" pitchFamily="34" charset="-122"/>
+                <a:cs typeface="Be Vietnam Pro" pitchFamily="34" charset="-120"/>
+              </a:rPr>
+              <a:t> trạng</a:t>
             </a:r>
             <a:r>
               <a:rPr lang="en-US" sz="3000" dirty="0" spc="0" kern="0">
@@ -7368,62 +7390,7 @@
                 <a:ea typeface="Be Vietnam Pro" pitchFamily="34" charset="-122"/>
                 <a:cs typeface="Be Vietnam Pro" pitchFamily="34" charset="-120"/>
               </a:rPr>
-              <a:t> lệnh,</a:t>
-            </a:r>
-            <a:r>
-              <a:rPr lang="en-US" sz="3000" dirty="0" spc="1" kern="0">
-                <a:solidFill>
-                  <a:srgbClr val="14161C"/>
-                </a:solidFill>
-                <a:latin typeface="Be Vietnam Pro" pitchFamily="34" charset="0"/>
-                <a:ea typeface="Be Vietnam Pro" pitchFamily="34" charset="-122"/>
-                <a:cs typeface="Be Vietnam Pro" pitchFamily="34" charset="-120"/>
-              </a:rPr>
-              <a:t> không</a:t>
-            </a:r>
-            <a:r>
-              <a:rPr lang="en-US" sz="3000" dirty="0" spc="-29" kern="0">
-                <a:solidFill>
-                  <a:srgbClr val="14161C"/>
-                </a:solidFill>
-                <a:latin typeface="Be Vietnam Pro" pitchFamily="34" charset="0"/>
-                <a:ea typeface="Be Vietnam Pro" pitchFamily="34" charset="-122"/>
-                <a:cs typeface="Be Vietnam Pro" pitchFamily="34" charset="-120"/>
-              </a:rPr>
-              <a:t> xét</a:t>
-            </a:r>
-            <a:r>
-              <a:rPr lang="en-US" sz="3000" dirty="0" spc="-21" kern="0">
-                <a:solidFill>
-                  <a:srgbClr val="14161C"/>
-                </a:solidFill>
-                <a:latin typeface="Be Vietnam Pro" pitchFamily="34" charset="0"/>
-                <a:ea typeface="Be Vietnam Pro" pitchFamily="34" charset="-122"/>
-                <a:cs typeface="Be Vietnam Pro" pitchFamily="34" charset="-120"/>
-              </a:rPr>
-              <a:t> trạng</a:t>
-            </a:r>
-            <a:r>
-              <a:rPr lang="en-US" sz="3000" dirty="0" spc="0" kern="0">
-                <a:solidFill>
-                  <a:srgbClr val="14161C"/>
-                </a:solidFill>
-                <a:latin typeface="Be Vietnam Pro" pitchFamily="34" charset="0"/>
-                <a:ea typeface="Be Vietnam Pro" pitchFamily="34" charset="-122"/>
-                <a:cs typeface="Be Vietnam Pro" pitchFamily="34" charset="-120"/>
-              </a:rPr>
               <a:t> thái</a:t>
-            </a:r>
-            <a:r>
-              <a:rPr lang="en-US" sz="3000" dirty="0" spc="-3" kern="0">
-                <a:solidFill>
-                  <a:srgbClr val="14161C"/>
-                </a:solidFill>
-                <a:latin typeface="Be Vietnam Pro" pitchFamily="34" charset="0"/>
-                <a:ea typeface="Be Vietnam Pro" pitchFamily="34" charset="-122"/>
-                <a:cs typeface="Be Vietnam Pro" pitchFamily="34" charset="-120"/>
-              </a:rPr>
-              <a:t> bên</a:t>
             </a:r>
             <a:r>
               <a:rPr lang="en-US" sz="3000" dirty="0" spc="-11" kern="0">
@@ -11011,6 +10978,17 @@
               <a:t> ci.</a:t>
             </a:r>
             <a:r>
+              <a:rPr lang="en-US" sz="2850" dirty="0" spc="-1" kern="0">
+                <a:solidFill>
+                  <a:srgbClr val="E4E1D8"/>
+                </a:solidFill>
+                <a:latin typeface="Be Vietnam Pro" pitchFamily="34" charset="0"/>
+                <a:ea typeface="Be Vietnam Pro" pitchFamily="34" charset="-122"/>
+                <a:cs typeface="Be Vietnam Pro" pitchFamily="34" charset="-120"/>
+              </a:rPr>
+              <a:t> Đáp</a:t>
+            </a:r>
+            <a:r>
               <a:rPr lang="en-US" sz="2850" dirty="0" spc="0" kern="0">
                 <a:solidFill>
                   <a:srgbClr val="E4E1D8"/>
@@ -11019,32 +10997,10 @@
                 <a:ea typeface="Be Vietnam Pro" pitchFamily="34" charset="-122"/>
                 <a:cs typeface="Be Vietnam Pro" pitchFamily="34" charset="-120"/>
               </a:rPr>
-              <a:t> Câu</a:t>
-            </a:r>
-            <a:r>
-              <a:rPr lang="en-US" sz="2850" dirty="0" spc="-27" kern="0">
-                <a:solidFill>
-                  <a:srgbClr val="E4E1D8"/>
-                </a:solidFill>
-                <a:latin typeface="Be Vietnam Pro" pitchFamily="34" charset="0"/>
-                <a:ea typeface="Be Vietnam Pro" pitchFamily="34" charset="-122"/>
-                <a:cs typeface="Be Vietnam Pro" pitchFamily="34" charset="-120"/>
-              </a:rPr>
-              <a:t> trả</a:t>
+              <a:t> án:</a:t>
             </a:r>
             <a:r>
               <a:rPr lang="en-US" sz="2850" dirty="0" spc="1" kern="0">
-                <a:solidFill>
-                  <a:srgbClr val="E4E1D8"/>
-                </a:solidFill>
-                <a:latin typeface="Be Vietnam Pro" pitchFamily="34" charset="0"/>
-                <a:ea typeface="Be Vietnam Pro" pitchFamily="34" charset="-122"/>
-                <a:cs typeface="Be Vietnam Pro" pitchFamily="34" charset="-120"/>
-              </a:rPr>
-              <a:t> lời:</a:t>
-            </a:r>
-            <a:r>
-              <a:rPr lang="en-US" sz="2850" dirty="0" spc="0" kern="0">
                 <a:solidFill>
                   <a:srgbClr val="E4E1D8"/>
                 </a:solidFill>
@@ -11263,7 +11219,7 @@
               <a:buNone/>
             </a:pPr>
             <a:r>
-              <a:rPr lang="en-US" sz="2550" dirty="0" spc="-7" kern="0">
+              <a:rPr lang="en-US" sz="2550" dirty="0" spc="-77" kern="0">
                 <a:solidFill>
                   <a:srgbClr val="E4E1D8"/>
                 </a:solidFill>
@@ -11271,10 +11227,10 @@
                 <a:ea typeface="Be Vietnam Pro" pitchFamily="34" charset="-122"/>
                 <a:cs typeface="Be Vietnam Pro" pitchFamily="34" charset="-120"/>
               </a:rPr>
-              <a:t>Một</a:t>
-            </a:r>
-            <a:r>
-              <a:rPr lang="en-US" sz="2550" dirty="0" spc="-11" kern="0">
+              <a:t>Tệp</a:t>
+            </a:r>
+            <a:r>
+              <a:rPr lang="en-US" sz="2550" dirty="0" spc="11" kern="0">
                 <a:solidFill>
                   <a:srgbClr val="E4E1D8"/>
                 </a:solidFill>
@@ -11282,10 +11238,10 @@
                 <a:ea typeface="Be Vietnam Pro" pitchFamily="34" charset="-122"/>
                 <a:cs typeface="Be Vietnam Pro" pitchFamily="34" charset="-120"/>
               </a:rPr>
-              <a:t> tệp</a:t>
-            </a:r>
-            <a:r>
-              <a:rPr lang="en-US" sz="2550" dirty="0" spc="10" kern="0">
+              <a:t> đổi:</a:t>
+            </a:r>
+            <a:r>
+              <a:rPr lang="en-US" sz="2550" dirty="0" spc="-1" kern="0">
                 <a:solidFill>
                   <a:srgbClr val="E4E1D8"/>
                 </a:solidFill>
@@ -11293,29 +11249,7 @@
                 <a:ea typeface="Be Vietnam Pro" pitchFamily="34" charset="-122"/>
                 <a:cs typeface="Be Vietnam Pro" pitchFamily="34" charset="-120"/>
               </a:rPr>
-              <a:t> đổi:</a:t>
-            </a:r>
-            <a:r>
-              <a:rPr lang="en-US" sz="2550" dirty="0" spc="0" kern="0">
-                <a:solidFill>
-                  <a:srgbClr val="E4E1D8"/>
-                </a:solidFill>
-                <a:latin typeface="Be Vietnam Pro" pitchFamily="34" charset="0"/>
-                <a:ea typeface="Be Vietnam Pro" pitchFamily="34" charset="-122"/>
-                <a:cs typeface="Be Vietnam Pro" pitchFamily="34" charset="-120"/>
-              </a:rPr>
-              <a:t> lớp</a:t>
-            </a:r>
-            <a:r>
-              <a:rPr lang="en-US" sz="2550" dirty="0" spc="-1" kern="0">
-                <a:solidFill>
-                  <a:srgbClr val="E4E1D8"/>
-                </a:solidFill>
-                <a:latin typeface="Be Vietnam Pro" pitchFamily="34" charset="0"/>
-                <a:ea typeface="Be Vietnam Pro" pitchFamily="34" charset="-122"/>
-                <a:cs typeface="Be Vietnam Pro" pitchFamily="34" charset="-120"/>
-              </a:rPr>
-              <a:t> COPY</a:t>
+              <a:t> lớp COPY</a:t>
             </a:r>
             <a:r>
               <a:rPr lang="en-US" sz="2550" dirty="0" spc="-11" kern="0">
@@ -12616,17 +12550,6 @@
             </a:r>
             <a:r>
               <a:rPr lang="en-US" sz="2550" dirty="0" spc="-1" kern="0">
-                <a:solidFill>
-                  <a:srgbClr val="14161C"/>
-                </a:solidFill>
-                <a:latin typeface="Be Vietnam Pro" pitchFamily="34" charset="0"/>
-                <a:ea typeface="Be Vietnam Pro" pitchFamily="34" charset="-122"/>
-                <a:cs typeface="Be Vietnam Pro" pitchFamily="34" charset="-120"/>
-              </a:rPr>
-              <a:t> mọi</a:t>
-            </a:r>
-            <a:r>
-              <a:rPr lang="en-US" sz="2550" dirty="0" spc="0" kern="0">
                 <a:solidFill>
                   <a:srgbClr val="14161C"/>
                 </a:solidFill>
